--- a/docs/commercial/business-32-ai-skill-studio/customer-package/Business32_Verified_Skill_Card_Sample.pptx
+++ b/docs/commercial/business-32-ai-skill-studio/customer-package/Business32_Verified_Skill_Card_Sample.pptx
@@ -3322,7 +3322,7 @@
         <p:spPr>
           <a:xfrm>
             <a:off x="548640" y="1645920"/>
-            <a:ext cx="1920240" cy="365760"/>
+            <a:ext cx="2011680" cy="365760"/>
           </a:xfrm>
           <a:prstGeom prst="rect">
             <a:avLst/>
@@ -3355,7 +3355,7 @@
         </p:nvSpPr>
         <p:spPr>
           <a:xfrm>
-            <a:off x="2560320" y="1645920"/>
+            <a:off x="2697480" y="1645920"/>
             <a:ext cx="3474720" cy="457200"/>
           </a:xfrm>
           <a:prstGeom prst="rect">
@@ -3370,9 +3370,9 @@
           <a:lstStyle/>
           <a:p>
             <a:r>
-              <a:rPr sz="1000" b="0">
-                <a:solidFill>
-                  <a:srgbClr val="6B7280"/>
+              <a:rPr sz="1100" b="0">
+                <a:solidFill>
+                  <a:srgbClr val="3F4653"/>
                 </a:solidFill>
                 <a:latin typeface="NanumSquareRound"/>
               </a:rPr>
@@ -3390,7 +3390,7 @@
         <p:spPr>
           <a:xfrm>
             <a:off x="6263640" y="1645920"/>
-            <a:ext cx="1920240" cy="365760"/>
+            <a:ext cx="2011680" cy="365760"/>
           </a:xfrm>
           <a:prstGeom prst="rect">
             <a:avLst/>
@@ -3423,7 +3423,7 @@
         </p:nvSpPr>
         <p:spPr>
           <a:xfrm>
-            <a:off x="8275320" y="1645920"/>
+            <a:off x="8412480" y="1645920"/>
             <a:ext cx="3474720" cy="457200"/>
           </a:xfrm>
           <a:prstGeom prst="rect">
@@ -3438,9 +3438,9 @@
           <a:lstStyle/>
           <a:p>
             <a:r>
-              <a:rPr sz="1000" b="0">
-                <a:solidFill>
-                  <a:srgbClr val="6B7280"/>
+              <a:rPr sz="1100" b="0">
+                <a:solidFill>
+                  <a:srgbClr val="3F4653"/>
                 </a:solidFill>
                 <a:latin typeface="NanumSquareRound"/>
               </a:rPr>
@@ -3457,8 +3457,8 @@
         </p:nvSpPr>
         <p:spPr>
           <a:xfrm>
-            <a:off x="548640" y="2148840"/>
-            <a:ext cx="1920240" cy="365760"/>
+            <a:off x="548640" y="2194560"/>
+            <a:ext cx="2011680" cy="365760"/>
           </a:xfrm>
           <a:prstGeom prst="rect">
             <a:avLst/>
@@ -3491,7 +3491,7 @@
         </p:nvSpPr>
         <p:spPr>
           <a:xfrm>
-            <a:off x="2560320" y="2148840"/>
+            <a:off x="2697480" y="2194560"/>
             <a:ext cx="3474720" cy="457200"/>
           </a:xfrm>
           <a:prstGeom prst="rect">
@@ -3506,9 +3506,9 @@
           <a:lstStyle/>
           <a:p>
             <a:r>
-              <a:rPr sz="1000" b="0">
-                <a:solidFill>
-                  <a:srgbClr val="6B7280"/>
+              <a:rPr sz="1100" b="0">
+                <a:solidFill>
+                  <a:srgbClr val="3F4653"/>
                 </a:solidFill>
                 <a:latin typeface="NanumSquareRound"/>
               </a:rPr>
@@ -3525,8 +3525,8 @@
         </p:nvSpPr>
         <p:spPr>
           <a:xfrm>
-            <a:off x="6263640" y="2148840"/>
-            <a:ext cx="1920240" cy="365760"/>
+            <a:off x="6263640" y="2194560"/>
+            <a:ext cx="2011680" cy="365760"/>
           </a:xfrm>
           <a:prstGeom prst="rect">
             <a:avLst/>
@@ -3559,7 +3559,7 @@
         </p:nvSpPr>
         <p:spPr>
           <a:xfrm>
-            <a:off x="8275320" y="2148840"/>
+            <a:off x="8412480" y="2194560"/>
             <a:ext cx="3474720" cy="457200"/>
           </a:xfrm>
           <a:prstGeom prst="rect">
@@ -3574,9 +3574,9 @@
           <a:lstStyle/>
           <a:p>
             <a:r>
-              <a:rPr sz="1000" b="0">
-                <a:solidFill>
-                  <a:srgbClr val="6B7280"/>
+              <a:rPr sz="1100" b="0">
+                <a:solidFill>
+                  <a:srgbClr val="3F4653"/>
                 </a:solidFill>
                 <a:latin typeface="NanumSquareRound"/>
               </a:rPr>
@@ -3593,8 +3593,8 @@
         </p:nvSpPr>
         <p:spPr>
           <a:xfrm>
-            <a:off x="548640" y="2651760"/>
-            <a:ext cx="1920240" cy="365760"/>
+            <a:off x="548640" y="2743200"/>
+            <a:ext cx="2011680" cy="365760"/>
           </a:xfrm>
           <a:prstGeom prst="rect">
             <a:avLst/>
@@ -3627,7 +3627,7 @@
         </p:nvSpPr>
         <p:spPr>
           <a:xfrm>
-            <a:off x="2560320" y="2651760"/>
+            <a:off x="2697480" y="2743200"/>
             <a:ext cx="3474720" cy="457200"/>
           </a:xfrm>
           <a:prstGeom prst="rect">
@@ -3642,9 +3642,9 @@
           <a:lstStyle/>
           <a:p>
             <a:r>
-              <a:rPr sz="1000" b="0">
-                <a:solidFill>
-                  <a:srgbClr val="6B7280"/>
+              <a:rPr sz="1100" b="0">
+                <a:solidFill>
+                  <a:srgbClr val="3F4653"/>
                 </a:solidFill>
                 <a:latin typeface="NanumSquareRound"/>
               </a:rPr>
@@ -3661,8 +3661,8 @@
         </p:nvSpPr>
         <p:spPr>
           <a:xfrm>
-            <a:off x="6263640" y="2651760"/>
-            <a:ext cx="1920240" cy="365760"/>
+            <a:off x="6263640" y="2743200"/>
+            <a:ext cx="2011680" cy="365760"/>
           </a:xfrm>
           <a:prstGeom prst="rect">
             <a:avLst/>
@@ -3695,7 +3695,7 @@
         </p:nvSpPr>
         <p:spPr>
           <a:xfrm>
-            <a:off x="8275320" y="2651760"/>
+            <a:off x="8412480" y="2743200"/>
             <a:ext cx="3474720" cy="457200"/>
           </a:xfrm>
           <a:prstGeom prst="rect">
@@ -3710,9 +3710,9 @@
           <a:lstStyle/>
           <a:p>
             <a:r>
-              <a:rPr sz="1000" b="0">
-                <a:solidFill>
-                  <a:srgbClr val="6B7280"/>
+              <a:rPr sz="1100" b="0">
+                <a:solidFill>
+                  <a:srgbClr val="3F4653"/>
                 </a:solidFill>
                 <a:latin typeface="NanumSquareRound"/>
               </a:rPr>
@@ -3764,7 +3764,7 @@
         <p:spPr>
           <a:xfrm>
             <a:off x="548640" y="4251960"/>
-            <a:ext cx="1920240" cy="365760"/>
+            <a:ext cx="2011680" cy="365760"/>
           </a:xfrm>
           <a:prstGeom prst="rect">
             <a:avLst/>
@@ -3797,7 +3797,7 @@
         </p:nvSpPr>
         <p:spPr>
           <a:xfrm>
-            <a:off x="2560320" y="4251960"/>
+            <a:off x="2697480" y="4251960"/>
             <a:ext cx="3474720" cy="457200"/>
           </a:xfrm>
           <a:prstGeom prst="rect">
@@ -3812,9 +3812,9 @@
           <a:lstStyle/>
           <a:p>
             <a:r>
-              <a:rPr sz="1000" b="0">
-                <a:solidFill>
-                  <a:srgbClr val="6B7280"/>
+              <a:rPr sz="1100" b="0">
+                <a:solidFill>
+                  <a:srgbClr val="3F4653"/>
                 </a:solidFill>
                 <a:latin typeface="NanumSquareRound"/>
               </a:rPr>
@@ -3832,7 +3832,7 @@
         <p:spPr>
           <a:xfrm>
             <a:off x="6263640" y="4251960"/>
-            <a:ext cx="1920240" cy="365760"/>
+            <a:ext cx="2011680" cy="365760"/>
           </a:xfrm>
           <a:prstGeom prst="rect">
             <a:avLst/>
@@ -3865,7 +3865,7 @@
         </p:nvSpPr>
         <p:spPr>
           <a:xfrm>
-            <a:off x="8275320" y="4251960"/>
+            <a:off x="8412480" y="4251960"/>
             <a:ext cx="3474720" cy="457200"/>
           </a:xfrm>
           <a:prstGeom prst="rect">
@@ -3880,9 +3880,9 @@
           <a:lstStyle/>
           <a:p>
             <a:r>
-              <a:rPr sz="1000" b="0">
-                <a:solidFill>
-                  <a:srgbClr val="6B7280"/>
+              <a:rPr sz="1100" b="0">
+                <a:solidFill>
+                  <a:srgbClr val="3F4653"/>
                 </a:solidFill>
                 <a:latin typeface="NanumSquareRound"/>
               </a:rPr>
@@ -3899,8 +3899,8 @@
         </p:nvSpPr>
         <p:spPr>
           <a:xfrm>
-            <a:off x="548640" y="4754880"/>
-            <a:ext cx="1920240" cy="365760"/>
+            <a:off x="548640" y="4800600"/>
+            <a:ext cx="2011680" cy="365760"/>
           </a:xfrm>
           <a:prstGeom prst="rect">
             <a:avLst/>
@@ -3933,7 +3933,7 @@
         </p:nvSpPr>
         <p:spPr>
           <a:xfrm>
-            <a:off x="2560320" y="4754880"/>
+            <a:off x="2697480" y="4800600"/>
             <a:ext cx="3474720" cy="457200"/>
           </a:xfrm>
           <a:prstGeom prst="rect">
@@ -3948,9 +3948,9 @@
           <a:lstStyle/>
           <a:p>
             <a:r>
-              <a:rPr sz="1000" b="0">
-                <a:solidFill>
-                  <a:srgbClr val="6B7280"/>
+              <a:rPr sz="1100" b="0">
+                <a:solidFill>
+                  <a:srgbClr val="3F4653"/>
                 </a:solidFill>
                 <a:latin typeface="NanumSquareRound"/>
               </a:rPr>
@@ -3967,8 +3967,8 @@
         </p:nvSpPr>
         <p:spPr>
           <a:xfrm>
-            <a:off x="6263640" y="4754880"/>
-            <a:ext cx="1920240" cy="365760"/>
+            <a:off x="6263640" y="4800600"/>
+            <a:ext cx="2011680" cy="365760"/>
           </a:xfrm>
           <a:prstGeom prst="rect">
             <a:avLst/>
@@ -4001,7 +4001,7 @@
         </p:nvSpPr>
         <p:spPr>
           <a:xfrm>
-            <a:off x="8275320" y="4754880"/>
+            <a:off x="8412480" y="4800600"/>
             <a:ext cx="3474720" cy="457200"/>
           </a:xfrm>
           <a:prstGeom prst="rect">
@@ -4016,9 +4016,9 @@
           <a:lstStyle/>
           <a:p>
             <a:r>
-              <a:rPr sz="1000" b="0">
-                <a:solidFill>
-                  <a:srgbClr val="6B7280"/>
+              <a:rPr sz="1100" b="0">
+                <a:solidFill>
+                  <a:srgbClr val="3F4653"/>
                 </a:solidFill>
                 <a:latin typeface="NanumSquareRound"/>
               </a:rPr>
@@ -4035,8 +4035,8 @@
         </p:nvSpPr>
         <p:spPr>
           <a:xfrm>
-            <a:off x="548640" y="5257800"/>
-            <a:ext cx="1920240" cy="365760"/>
+            <a:off x="548640" y="5349240"/>
+            <a:ext cx="2011680" cy="365760"/>
           </a:xfrm>
           <a:prstGeom prst="rect">
             <a:avLst/>
@@ -4069,7 +4069,7 @@
         </p:nvSpPr>
         <p:spPr>
           <a:xfrm>
-            <a:off x="2560320" y="5257800"/>
+            <a:off x="2697480" y="5349240"/>
             <a:ext cx="3474720" cy="457200"/>
           </a:xfrm>
           <a:prstGeom prst="rect">
@@ -4084,9 +4084,9 @@
           <a:lstStyle/>
           <a:p>
             <a:r>
-              <a:rPr sz="1000" b="0">
-                <a:solidFill>
-                  <a:srgbClr val="6B7280"/>
+              <a:rPr sz="1100" b="0">
+                <a:solidFill>
+                  <a:srgbClr val="3F4653"/>
                 </a:solidFill>
                 <a:latin typeface="NanumSquareRound"/>
               </a:rPr>
@@ -4103,8 +4103,8 @@
         </p:nvSpPr>
         <p:spPr>
           <a:xfrm>
-            <a:off x="6263640" y="5257800"/>
-            <a:ext cx="1920240" cy="365760"/>
+            <a:off x="6263640" y="5349240"/>
+            <a:ext cx="2011680" cy="365760"/>
           </a:xfrm>
           <a:prstGeom prst="rect">
             <a:avLst/>
@@ -4137,7 +4137,7 @@
         </p:nvSpPr>
         <p:spPr>
           <a:xfrm>
-            <a:off x="8275320" y="5257800"/>
+            <a:off x="8412480" y="5349240"/>
             <a:ext cx="3474720" cy="457200"/>
           </a:xfrm>
           <a:prstGeom prst="rect">
@@ -4152,9 +4152,9 @@
           <a:lstStyle/>
           <a:p>
             <a:r>
-              <a:rPr sz="1000" b="0">
-                <a:solidFill>
-                  <a:srgbClr val="6B7280"/>
+              <a:rPr sz="1100" b="0">
+                <a:solidFill>
+                  <a:srgbClr val="3F4653"/>
                 </a:solidFill>
                 <a:latin typeface="NanumSquareRound"/>
               </a:rPr>
@@ -4249,8 +4249,8 @@
         </p:nvSpPr>
         <p:spPr>
           <a:xfrm>
-            <a:off x="365760" y="6473952"/>
-            <a:ext cx="11430000" cy="320040"/>
+            <a:off x="548640" y="6035040"/>
+            <a:ext cx="11064240" cy="274320"/>
           </a:xfrm>
           <a:prstGeom prst="rect">
             <a:avLst/>
@@ -4258,7 +4258,7 @@
           <a:noFill/>
         </p:spPr>
         <p:txBody>
-          <a:bodyPr wrap="square">
+          <a:bodyPr wrap="none">
             <a:spAutoFit/>
           </a:bodyPr>
           <a:lstStyle/>
@@ -4414,7 +4414,7 @@
         <p:spPr>
           <a:xfrm>
             <a:off x="548640" y="1645920"/>
-            <a:ext cx="1920240" cy="365760"/>
+            <a:ext cx="2011680" cy="365760"/>
           </a:xfrm>
           <a:prstGeom prst="rect">
             <a:avLst/>
@@ -4447,7 +4447,7 @@
         </p:nvSpPr>
         <p:spPr>
           <a:xfrm>
-            <a:off x="2560320" y="1645920"/>
+            <a:off x="2697480" y="1645920"/>
             <a:ext cx="3474720" cy="457200"/>
           </a:xfrm>
           <a:prstGeom prst="rect">
@@ -4462,9 +4462,9 @@
           <a:lstStyle/>
           <a:p>
             <a:r>
-              <a:rPr sz="1000" b="0">
-                <a:solidFill>
-                  <a:srgbClr val="6B7280"/>
+              <a:rPr sz="1100" b="0">
+                <a:solidFill>
+                  <a:srgbClr val="3F4653"/>
                 </a:solidFill>
                 <a:latin typeface="NanumSquareRound"/>
               </a:rPr>
@@ -4482,7 +4482,7 @@
         <p:spPr>
           <a:xfrm>
             <a:off x="6263640" y="1645920"/>
-            <a:ext cx="1920240" cy="365760"/>
+            <a:ext cx="2011680" cy="365760"/>
           </a:xfrm>
           <a:prstGeom prst="rect">
             <a:avLst/>
@@ -4515,7 +4515,7 @@
         </p:nvSpPr>
         <p:spPr>
           <a:xfrm>
-            <a:off x="8275320" y="1645920"/>
+            <a:off x="8412480" y="1645920"/>
             <a:ext cx="3474720" cy="457200"/>
           </a:xfrm>
           <a:prstGeom prst="rect">
@@ -4530,9 +4530,9 @@
           <a:lstStyle/>
           <a:p>
             <a:r>
-              <a:rPr sz="1000" b="0">
-                <a:solidFill>
-                  <a:srgbClr val="6B7280"/>
+              <a:rPr sz="1100" b="0">
+                <a:solidFill>
+                  <a:srgbClr val="3F4653"/>
                 </a:solidFill>
                 <a:latin typeface="NanumSquareRound"/>
               </a:rPr>
@@ -4549,8 +4549,8 @@
         </p:nvSpPr>
         <p:spPr>
           <a:xfrm>
-            <a:off x="548640" y="2148840"/>
-            <a:ext cx="1920240" cy="365760"/>
+            <a:off x="548640" y="2194560"/>
+            <a:ext cx="2011680" cy="365760"/>
           </a:xfrm>
           <a:prstGeom prst="rect">
             <a:avLst/>
@@ -4583,7 +4583,7 @@
         </p:nvSpPr>
         <p:spPr>
           <a:xfrm>
-            <a:off x="2560320" y="2148840"/>
+            <a:off x="2697480" y="2194560"/>
             <a:ext cx="3474720" cy="457200"/>
           </a:xfrm>
           <a:prstGeom prst="rect">
@@ -4598,9 +4598,9 @@
           <a:lstStyle/>
           <a:p>
             <a:r>
-              <a:rPr sz="1000" b="0">
-                <a:solidFill>
-                  <a:srgbClr val="6B7280"/>
+              <a:rPr sz="1100" b="0">
+                <a:solidFill>
+                  <a:srgbClr val="3F4653"/>
                 </a:solidFill>
                 <a:latin typeface="NanumSquareRound"/>
               </a:rPr>
@@ -4617,8 +4617,8 @@
         </p:nvSpPr>
         <p:spPr>
           <a:xfrm>
-            <a:off x="6263640" y="2148840"/>
-            <a:ext cx="1920240" cy="365760"/>
+            <a:off x="6263640" y="2194560"/>
+            <a:ext cx="2011680" cy="365760"/>
           </a:xfrm>
           <a:prstGeom prst="rect">
             <a:avLst/>
@@ -4651,7 +4651,7 @@
         </p:nvSpPr>
         <p:spPr>
           <a:xfrm>
-            <a:off x="8275320" y="2148840"/>
+            <a:off x="8412480" y="2194560"/>
             <a:ext cx="3474720" cy="457200"/>
           </a:xfrm>
           <a:prstGeom prst="rect">
@@ -4666,9 +4666,9 @@
           <a:lstStyle/>
           <a:p>
             <a:r>
-              <a:rPr sz="1000" b="0">
-                <a:solidFill>
-                  <a:srgbClr val="6B7280"/>
+              <a:rPr sz="1100" b="0">
+                <a:solidFill>
+                  <a:srgbClr val="3F4653"/>
                 </a:solidFill>
                 <a:latin typeface="NanumSquareRound"/>
               </a:rPr>
@@ -4685,8 +4685,8 @@
         </p:nvSpPr>
         <p:spPr>
           <a:xfrm>
-            <a:off x="548640" y="2651760"/>
-            <a:ext cx="1920240" cy="365760"/>
+            <a:off x="548640" y="2743200"/>
+            <a:ext cx="2011680" cy="365760"/>
           </a:xfrm>
           <a:prstGeom prst="rect">
             <a:avLst/>
@@ -4719,7 +4719,7 @@
         </p:nvSpPr>
         <p:spPr>
           <a:xfrm>
-            <a:off x="2560320" y="2651760"/>
+            <a:off x="2697480" y="2743200"/>
             <a:ext cx="3474720" cy="457200"/>
           </a:xfrm>
           <a:prstGeom prst="rect">
@@ -4734,9 +4734,9 @@
           <a:lstStyle/>
           <a:p>
             <a:r>
-              <a:rPr sz="1000" b="0">
-                <a:solidFill>
-                  <a:srgbClr val="6B7280"/>
+              <a:rPr sz="1100" b="0">
+                <a:solidFill>
+                  <a:srgbClr val="3F4653"/>
                 </a:solidFill>
                 <a:latin typeface="NanumSquareRound"/>
               </a:rPr>
@@ -4753,8 +4753,8 @@
         </p:nvSpPr>
         <p:spPr>
           <a:xfrm>
-            <a:off x="6263640" y="2651760"/>
-            <a:ext cx="1920240" cy="365760"/>
+            <a:off x="6263640" y="2743200"/>
+            <a:ext cx="2011680" cy="365760"/>
           </a:xfrm>
           <a:prstGeom prst="rect">
             <a:avLst/>
@@ -4787,7 +4787,7 @@
         </p:nvSpPr>
         <p:spPr>
           <a:xfrm>
-            <a:off x="8275320" y="2651760"/>
+            <a:off x="8412480" y="2743200"/>
             <a:ext cx="3474720" cy="457200"/>
           </a:xfrm>
           <a:prstGeom prst="rect">
@@ -4802,9 +4802,9 @@
           <a:lstStyle/>
           <a:p>
             <a:r>
-              <a:rPr sz="1000" b="0">
-                <a:solidFill>
-                  <a:srgbClr val="6B7280"/>
+              <a:rPr sz="1100" b="0">
+                <a:solidFill>
+                  <a:srgbClr val="3F4653"/>
                 </a:solidFill>
                 <a:latin typeface="NanumSquareRound"/>
               </a:rPr>
@@ -4821,7 +4821,7 @@
         </p:nvSpPr>
         <p:spPr>
           <a:xfrm>
-            <a:off x="548640" y="4206240"/>
+            <a:off x="548640" y="3383280"/>
             <a:ext cx="11064240" cy="365760"/>
           </a:xfrm>
           <a:prstGeom prst="rect">
@@ -4855,8 +4855,8 @@
         </p:nvSpPr>
         <p:spPr>
           <a:xfrm>
-            <a:off x="548640" y="4754880"/>
-            <a:ext cx="11064240" cy="1463040"/>
+            <a:off x="548640" y="4023360"/>
+            <a:ext cx="11064240" cy="1554480"/>
           </a:xfrm>
           <a:prstGeom prst="rect">
             <a:avLst/>
@@ -4967,8 +4967,8 @@
         </p:nvSpPr>
         <p:spPr>
           <a:xfrm>
-            <a:off x="365760" y="6473952"/>
-            <a:ext cx="11430000" cy="320040"/>
+            <a:off x="548640" y="6035040"/>
+            <a:ext cx="11064240" cy="274320"/>
           </a:xfrm>
           <a:prstGeom prst="rect">
             <a:avLst/>
@@ -4976,7 +4976,7 @@
           <a:noFill/>
         </p:spPr>
         <p:txBody>
-          <a:bodyPr wrap="square">
+          <a:bodyPr wrap="none">
             <a:spAutoFit/>
           </a:bodyPr>
           <a:lstStyle/>
